--- a/assets/powerpoints/module-n2-secretaire/A2-ou-ou-u.pptx
+++ b/assets/powerpoints/module-n2-secretaire/A2-ou-ou-u.pptx
@@ -8806,7 +8806,43 @@
                 </a:solidFill>
                 <a:latin typeface="Verdana"/>
               </a:rPr>
-              <a:t>Pour le son de &lt;b&gt;bonjour&lt;/b&gt;, la langue recule au fond de la bouche. Pour le son de &lt;b&gt;une&lt;/b&gt;, elle monte en avant, derrière les dents du bas. Les lèvres, elles, font la même chose.</a:t>
+              <a:t>Pour le son de </a:t>
+            </a:r>
+            <a:r>
+              <a:rPr sz="2000" b="1" i="0">
+                <a:solidFill>
+                  <a:srgbClr val="4B4F52"/>
+                </a:solidFill>
+                <a:latin typeface="Verdana"/>
+              </a:rPr>
+              <a:t>bonjour</a:t>
+            </a:r>
+            <a:r>
+              <a:rPr sz="2000" b="0" i="0">
+                <a:solidFill>
+                  <a:srgbClr val="4B4F52"/>
+                </a:solidFill>
+                <a:latin typeface="Verdana"/>
+              </a:rPr>
+              <a:t>, la langue recule au fond de la bouche. Pour le son de </a:t>
+            </a:r>
+            <a:r>
+              <a:rPr sz="2000" b="1" i="0">
+                <a:solidFill>
+                  <a:srgbClr val="4B4F52"/>
+                </a:solidFill>
+                <a:latin typeface="Verdana"/>
+              </a:rPr>
+              <a:t>une</a:t>
+            </a:r>
+            <a:r>
+              <a:rPr sz="2000" b="0" i="0">
+                <a:solidFill>
+                  <a:srgbClr val="4B4F52"/>
+                </a:solidFill>
+                <a:latin typeface="Verdana"/>
+              </a:rPr>
+              <a:t>, elle monte en avant, derrière les dents du bas. Les lèvres, elles, font la même chose.</a:t>
             </a:r>
           </a:p>
         </p:txBody>
